--- a/TEMPLATE_CH.pptx
+++ b/TEMPLATE_CH.pptx
@@ -261,7 +261,7 @@
           <a:p>
             <a:fld id="{E759A0DE-F190-5444-87AC-4719D5F20D15}" type="datetimeFigureOut">
               <a:rPr lang="en-US" smtClean="0"/>
-              <a:t>6/13/26</a:t>
+              <a:t>6/19/26</a:t>
             </a:fld>
             <a:endParaRPr lang="en-US"/>
           </a:p>
@@ -459,7 +459,7 @@
           <a:p>
             <a:fld id="{E759A0DE-F190-5444-87AC-4719D5F20D15}" type="datetimeFigureOut">
               <a:rPr lang="en-US" smtClean="0"/>
-              <a:t>6/13/26</a:t>
+              <a:t>6/19/26</a:t>
             </a:fld>
             <a:endParaRPr lang="en-US"/>
           </a:p>
@@ -667,7 +667,7 @@
           <a:p>
             <a:fld id="{E759A0DE-F190-5444-87AC-4719D5F20D15}" type="datetimeFigureOut">
               <a:rPr lang="en-US" smtClean="0"/>
-              <a:t>6/13/26</a:t>
+              <a:t>6/19/26</a:t>
             </a:fld>
             <a:endParaRPr lang="en-US"/>
           </a:p>
@@ -865,7 +865,7 @@
           <a:p>
             <a:fld id="{E759A0DE-F190-5444-87AC-4719D5F20D15}" type="datetimeFigureOut">
               <a:rPr lang="en-US" smtClean="0"/>
-              <a:t>6/13/26</a:t>
+              <a:t>6/19/26</a:t>
             </a:fld>
             <a:endParaRPr lang="en-US"/>
           </a:p>
@@ -1140,7 +1140,7 @@
           <a:p>
             <a:fld id="{E759A0DE-F190-5444-87AC-4719D5F20D15}" type="datetimeFigureOut">
               <a:rPr lang="en-US" smtClean="0"/>
-              <a:t>6/13/26</a:t>
+              <a:t>6/19/26</a:t>
             </a:fld>
             <a:endParaRPr lang="en-US"/>
           </a:p>
@@ -1405,7 +1405,7 @@
           <a:p>
             <a:fld id="{E759A0DE-F190-5444-87AC-4719D5F20D15}" type="datetimeFigureOut">
               <a:rPr lang="en-US" smtClean="0"/>
-              <a:t>6/13/26</a:t>
+              <a:t>6/19/26</a:t>
             </a:fld>
             <a:endParaRPr lang="en-US"/>
           </a:p>
@@ -1817,7 +1817,7 @@
           <a:p>
             <a:fld id="{E759A0DE-F190-5444-87AC-4719D5F20D15}" type="datetimeFigureOut">
               <a:rPr lang="en-US" smtClean="0"/>
-              <a:t>6/13/26</a:t>
+              <a:t>6/19/26</a:t>
             </a:fld>
             <a:endParaRPr lang="en-US"/>
           </a:p>
@@ -1958,7 +1958,7 @@
           <a:p>
             <a:fld id="{E759A0DE-F190-5444-87AC-4719D5F20D15}" type="datetimeFigureOut">
               <a:rPr lang="en-US" smtClean="0"/>
-              <a:t>6/13/26</a:t>
+              <a:t>6/19/26</a:t>
             </a:fld>
             <a:endParaRPr lang="en-US"/>
           </a:p>
@@ -2071,7 +2071,7 @@
           <a:p>
             <a:fld id="{E759A0DE-F190-5444-87AC-4719D5F20D15}" type="datetimeFigureOut">
               <a:rPr lang="en-US" smtClean="0"/>
-              <a:t>6/13/26</a:t>
+              <a:t>6/19/26</a:t>
             </a:fld>
             <a:endParaRPr lang="en-US"/>
           </a:p>
@@ -2382,7 +2382,7 @@
           <a:p>
             <a:fld id="{E759A0DE-F190-5444-87AC-4719D5F20D15}" type="datetimeFigureOut">
               <a:rPr lang="en-US" smtClean="0"/>
-              <a:t>6/13/26</a:t>
+              <a:t>6/19/26</a:t>
             </a:fld>
             <a:endParaRPr lang="en-US"/>
           </a:p>
@@ -2670,7 +2670,7 @@
           <a:p>
             <a:fld id="{E759A0DE-F190-5444-87AC-4719D5F20D15}" type="datetimeFigureOut">
               <a:rPr lang="en-US" smtClean="0"/>
-              <a:t>6/13/26</a:t>
+              <a:t>6/19/26</a:t>
             </a:fld>
             <a:endParaRPr lang="en-US"/>
           </a:p>
@@ -2911,7 +2911,7 @@
           <a:p>
             <a:fld id="{E759A0DE-F190-5444-87AC-4719D5F20D15}" type="datetimeFigureOut">
               <a:rPr lang="en-US" smtClean="0"/>
-              <a:t>6/13/26</a:t>
+              <a:t>6/19/26</a:t>
             </a:fld>
             <a:endParaRPr lang="en-US"/>
           </a:p>
@@ -3882,8 +3882,8 @@
         </p:nvSpPr>
         <p:spPr>
           <a:xfrm>
-            <a:off x="682831" y="497702"/>
-            <a:ext cx="10826338" cy="5862596"/>
+            <a:off x="175846" y="152399"/>
+            <a:ext cx="11828585" cy="6541477"/>
           </a:xfrm>
         </p:spPr>
         <p:txBody>
@@ -4097,8 +4097,8 @@
         </p:nvSpPr>
         <p:spPr>
           <a:xfrm>
-            <a:off x="682831" y="497702"/>
-            <a:ext cx="10826338" cy="5862596"/>
+            <a:off x="222738" y="211015"/>
+            <a:ext cx="11699631" cy="6482862"/>
           </a:xfrm>
         </p:spPr>
         <p:txBody>
